--- a/docs/Razorpay_Buildathon_Action_Firewall_Deck.pptx
+++ b/docs/Razorpay_Buildathon_Action_Firewall_Deck.pptx
@@ -3461,16 +3461,8 @@
           </a:bodyPr>
           <a:lstStyle/>
           <a:p>
-            <a:pPr>
-              <a:defRPr sz="1000">
-                <a:solidFill>
-                  <a:srgbClr val="9CAED0"/>
-                </a:solidFill>
-                <a:latin typeface="Consolas"/>
-              </a:defRPr>
-            </a:pPr>
-            <a:r>
-              <a:t>Razorpay MCP-compatible actuator · deterministic policy · 147 tests · offline demo</a:t>
+            <a:r>
+              <a:t>Razorpay MCP-compatible actuator · deterministic policy · 148 tests · offline demo</a:t>
             </a:r>
           </a:p>
         </p:txBody>
@@ -3686,32 +3678,13 @@
           <a:bodyPr rtlCol="0" anchor="ctr" wrap="square" lIns="228600" tIns="182880" rIns="228600" bIns="182880"/>
           <a:lstStyle/>
           <a:p>
-            <a:pPr algn="ctr">
-              <a:spcAft>
-                <a:spcPts val="800"/>
-              </a:spcAft>
-              <a:defRPr sz="1600" b="1">
-                <a:solidFill>
-                  <a:srgbClr val="23D66F"/>
-                </a:solidFill>
-                <a:latin typeface="Georgia"/>
-              </a:defRPr>
-            </a:pPr>
             <a:r>
               <a:t>Verified System Properties</a:t>
             </a:r>
           </a:p>
           <a:p>
-            <a:pPr>
-              <a:defRPr sz="1200">
-                <a:solidFill>
-                  <a:srgbClr val="9CAED0"/>
-                </a:solidFill>
-                <a:latin typeface="Calibri"/>
-              </a:defRPr>
-            </a:pPr>
-            <a:r>
-              <a:t>• 147 passing backend tests covering pure spend policy, envelope drafts, voice boundaries, concurrency, and reconciliation</a:t>
+            <a:r>
+              <a:t>• 148 passing backend tests covering pure spend policy, envelope drafts, voice boundaries, concurrency, and reconciliation</a:t>
             </a:r>
             <a:br/>
             <a:r>
@@ -3773,32 +3746,13 @@
           <a:bodyPr rtlCol="0" anchor="ctr" wrap="square" lIns="228600" tIns="182880" rIns="228600" bIns="182880"/>
           <a:lstStyle/>
           <a:p>
-            <a:pPr algn="ctr">
-              <a:spcAft>
-                <a:spcPts val="800"/>
-              </a:spcAft>
-              <a:defRPr sz="1600" b="1">
-                <a:solidFill>
-                  <a:srgbClr val="3395FF"/>
-                </a:solidFill>
-                <a:latin typeface="Calibri"/>
-              </a:defRPr>
-            </a:pPr>
             <a:r>
               <a:t>Submission Status</a:t>
             </a:r>
           </a:p>
           <a:p>
-            <a:pPr>
-              <a:defRPr sz="1200">
-                <a:solidFill>
-                  <a:srgbClr val="9CAED0"/>
-                </a:solidFill>
-                <a:latin typeface="Calibri"/>
-              </a:defRPr>
-            </a:pPr>
-            <a:r>
-              <a:t>pytest → 147 passed · 650 eval cases · npm audit → 0 · offline rehearsals → passed</a:t>
+            <a:r>
+              <a:t>pytest → 148 passed · 650 eval cases · npm audit → 0 · offline rehearsals → passed</a:t>
             </a:r>
           </a:p>
         </p:txBody>
@@ -6969,30 +6923,11 @@
           <a:bodyPr rtlCol="0" anchor="ctr" wrap="square" lIns="228600" tIns="182880" rIns="228600" bIns="182880"/>
           <a:lstStyle/>
           <a:p>
-            <a:pPr algn="ctr">
-              <a:spcAft>
-                <a:spcPts val="800"/>
-              </a:spcAft>
-              <a:defRPr sz="1600" b="1">
-                <a:solidFill>
-                  <a:srgbClr val="23D66F"/>
-                </a:solidFill>
-                <a:latin typeface="Calibri"/>
-              </a:defRPr>
-            </a:pPr>
-            <a:r>
-              <a:t>147</a:t>
-            </a:r>
-          </a:p>
-          <a:p>
-            <a:pPr>
-              <a:defRPr sz="1200">
-                <a:solidFill>
-                  <a:srgbClr val="9CAED0"/>
-                </a:solidFill>
-                <a:latin typeface="Calibri"/>
-              </a:defRPr>
-            </a:pPr>
+            <a:r>
+              <a:t>148</a:t>
+            </a:r>
+          </a:p>
+          <a:p>
             <a:r>
               <a:t>Backend tests passing</a:t>
             </a:r>

--- a/docs/Razorpay_Buildathon_Action_Firewall_Deck.pptx
+++ b/docs/Razorpay_Buildathon_Action_Firewall_Deck.pptx
@@ -3461,6 +3461,14 @@
           </a:bodyPr>
           <a:lstStyle/>
           <a:p>
+            <a:pPr>
+              <a:defRPr sz="1000">
+                <a:solidFill>
+                  <a:srgbClr val="9CAED0"/>
+                </a:solidFill>
+                <a:latin typeface="Consolas"/>
+              </a:defRPr>
+            </a:pPr>
             <a:r>
               <a:t>Razorpay MCP-compatible actuator · deterministic policy · 148 tests · offline demo</a:t>
             </a:r>
@@ -3678,11 +3686,30 @@
           <a:bodyPr rtlCol="0" anchor="ctr" wrap="square" lIns="228600" tIns="182880" rIns="228600" bIns="182880"/>
           <a:lstStyle/>
           <a:p>
+            <a:pPr algn="ctr">
+              <a:spcAft>
+                <a:spcPts val="800"/>
+              </a:spcAft>
+              <a:defRPr sz="1600" b="1">
+                <a:solidFill>
+                  <a:srgbClr val="23D66F"/>
+                </a:solidFill>
+                <a:latin typeface="Georgia"/>
+              </a:defRPr>
+            </a:pPr>
             <a:r>
               <a:t>Verified System Properties</a:t>
             </a:r>
           </a:p>
           <a:p>
+            <a:pPr>
+              <a:defRPr sz="1200">
+                <a:solidFill>
+                  <a:srgbClr val="9CAED0"/>
+                </a:solidFill>
+                <a:latin typeface="Calibri"/>
+              </a:defRPr>
+            </a:pPr>
             <a:r>
               <a:t>• 148 passing backend tests covering pure spend policy, envelope drafts, voice boundaries, concurrency, and reconciliation</a:t>
             </a:r>
@@ -3746,11 +3773,30 @@
           <a:bodyPr rtlCol="0" anchor="ctr" wrap="square" lIns="228600" tIns="182880" rIns="228600" bIns="182880"/>
           <a:lstStyle/>
           <a:p>
+            <a:pPr algn="ctr">
+              <a:spcAft>
+                <a:spcPts val="800"/>
+              </a:spcAft>
+              <a:defRPr sz="1600" b="1">
+                <a:solidFill>
+                  <a:srgbClr val="3395FF"/>
+                </a:solidFill>
+                <a:latin typeface="Calibri"/>
+              </a:defRPr>
+            </a:pPr>
             <a:r>
               <a:t>Submission Status</a:t>
             </a:r>
           </a:p>
           <a:p>
+            <a:pPr>
+              <a:defRPr sz="1200">
+                <a:solidFill>
+                  <a:srgbClr val="9CAED0"/>
+                </a:solidFill>
+                <a:latin typeface="Calibri"/>
+              </a:defRPr>
+            </a:pPr>
             <a:r>
               <a:t>pytest → 148 passed · 650 eval cases · npm audit → 0 · offline rehearsals → passed</a:t>
             </a:r>
@@ -6923,11 +6969,30 @@
           <a:bodyPr rtlCol="0" anchor="ctr" wrap="square" lIns="228600" tIns="182880" rIns="228600" bIns="182880"/>
           <a:lstStyle/>
           <a:p>
-            <a:r>
-              <a:t>148</a:t>
-            </a:r>
-          </a:p>
-          <a:p>
+            <a:pPr algn="ctr">
+              <a:spcAft>
+                <a:spcPts val="800"/>
+              </a:spcAft>
+              <a:defRPr sz="1600" b="1">
+                <a:solidFill>
+                  <a:srgbClr val="23D66F"/>
+                </a:solidFill>
+                <a:latin typeface="Calibri"/>
+              </a:defRPr>
+            </a:pPr>
+            <a:r>
+              <a:t>147</a:t>
+            </a:r>
+          </a:p>
+          <a:p>
+            <a:pPr>
+              <a:defRPr sz="1200">
+                <a:solidFill>
+                  <a:srgbClr val="9CAED0"/>
+                </a:solidFill>
+                <a:latin typeface="Calibri"/>
+              </a:defRPr>
+            </a:pPr>
             <a:r>
               <a:t>Backend tests passing</a:t>
             </a:r>

--- a/docs/Razorpay_Buildathon_Action_Firewall_Deck.pptx
+++ b/docs/Razorpay_Buildathon_Action_Firewall_Deck.pptx
@@ -3470,7 +3470,7 @@
               </a:defRPr>
             </a:pPr>
             <a:r>
-              <a:t>Razorpay MCP-compatible actuator · deterministic policy · 148 tests · offline demo</a:t>
+              <a:t>Razorpay MCP-compatible actuator · deterministic policy · 265 tests · offline demo</a:t>
             </a:r>
           </a:p>
         </p:txBody>
@@ -3711,7 +3711,7 @@
               </a:defRPr>
             </a:pPr>
             <a:r>
-              <a:t>• 148 passing backend tests covering pure spend policy, envelope drafts, voice boundaries, concurrency, and reconciliation</a:t>
+              <a:t>• 265 passing backend tests covering pure spend policy, envelope drafts, voice boundaries, concurrency, and reconciliation</a:t>
             </a:r>
             <a:br/>
             <a:r>
@@ -3798,7 +3798,7 @@
               </a:defRPr>
             </a:pPr>
             <a:r>
-              <a:t>pytest → 148 passed · 650 eval cases · npm audit → 0 · offline rehearsals → passed</a:t>
+              <a:t>pytest → 265 passed · 650 eval cases · npm audit → 0 · offline rehearsals → passed</a:t>
             </a:r>
           </a:p>
         </p:txBody>

--- a/docs/Razorpay_Buildathon_Action_Firewall_Deck.pptx
+++ b/docs/Razorpay_Buildathon_Action_Firewall_Deck.pptx
@@ -3470,7 +3470,7 @@
               </a:defRPr>
             </a:pPr>
             <a:r>
-              <a:t>Razorpay MCP-compatible actuator · deterministic policy · 265 tests · offline demo</a:t>
+              <a:t>Razorpay MCP-compatible actuator · deterministic policy · 316 tests · offline demo</a:t>
             </a:r>
           </a:p>
         </p:txBody>
@@ -3711,7 +3711,7 @@
               </a:defRPr>
             </a:pPr>
             <a:r>
-              <a:t>• 265 passing backend tests covering pure spend policy, envelope drafts, voice boundaries, concurrency, and reconciliation</a:t>
+              <a:t>• 316 passing backend tests covering pure spend policy, envelope drafts, voice boundaries, concurrency, and reconciliation</a:t>
             </a:r>
             <a:br/>
             <a:r>
@@ -3798,7 +3798,7 @@
               </a:defRPr>
             </a:pPr>
             <a:r>
-              <a:t>pytest → 265 passed · 650 eval cases · npm audit → 0 · offline rehearsals → passed</a:t>
+              <a:t>pytest → 316 passed · 650 eval cases · npm audit → 0 · offline rehearsals → passed</a:t>
             </a:r>
           </a:p>
         </p:txBody>

--- a/docs/Razorpay_Buildathon_Action_Firewall_Deck.pptx
+++ b/docs/Razorpay_Buildathon_Action_Firewall_Deck.pptx
@@ -3470,7 +3470,7 @@
               </a:defRPr>
             </a:pPr>
             <a:r>
-              <a:t>Razorpay MCP-compatible actuator · deterministic policy · 316 tests · offline demo</a:t>
+              <a:t>Razorpay MCP-compatible actuator · deterministic policy · 368 tests · offline demo</a:t>
             </a:r>
           </a:p>
         </p:txBody>
@@ -3711,7 +3711,7 @@
               </a:defRPr>
             </a:pPr>
             <a:r>
-              <a:t>• 316 passing backend tests covering pure spend policy, envelope drafts, voice boundaries, concurrency, and reconciliation</a:t>
+              <a:t>• 368 passing backend tests covering pure spend policy, envelope drafts, voice boundaries, concurrency, and reconciliation</a:t>
             </a:r>
             <a:br/>
             <a:r>
@@ -3798,7 +3798,7 @@
               </a:defRPr>
             </a:pPr>
             <a:r>
-              <a:t>pytest → 316 passed · 650 eval cases · npm audit → 0 · offline rehearsals → passed</a:t>
+              <a:t>pytest → 368 passed · 650 eval cases · npm audit → 0 · offline rehearsals → passed</a:t>
             </a:r>
           </a:p>
         </p:txBody>
@@ -6981,7 +6981,7 @@
               </a:defRPr>
             </a:pPr>
             <a:r>
-              <a:t>147</a:t>
+              <a:t>368</a:t>
             </a:r>
           </a:p>
           <a:p>
@@ -7133,7 +7133,7 @@
               </a:defRPr>
             </a:pPr>
             <a:r>
-              <a:t>550 / 550</a:t>
+              <a:t>800 / 800</a:t>
             </a:r>
           </a:p>
           <a:p>
@@ -7151,7 +7151,7 @@
             <a:br/>
             <a:br/>
             <a:r>
-              <a:t>Price, merchant, category, destination, and tampering breaches fail closed.</a:t>
+              <a:t>Across 21 failure families. A spend-cap-only guard — what most "AI guardrails" are — lets 640 of the same 800 through.</a:t>
             </a:r>
           </a:p>
         </p:txBody>
@@ -7209,7 +7209,7 @@
               </a:defRPr>
             </a:pPr>
             <a:r>
-              <a:t>8 → 1</a:t>
+              <a:t>20/20 → 0/20</a:t>
             </a:r>
           </a:p>
           <a:p>
@@ -7222,12 +7222,12 @@
               </a:defRPr>
             </a:pPr>
             <a:r>
-              <a:t>Concurrent claims to calls</a:t>
+              <a:t>Cap breaches under contention</a:t>
             </a:r>
             <a:br/>
             <a:br/>
             <a:r>
-              <a:t>Eight parallel attempts under one envelope; exactly one issued action.</a:t>
+              <a:t>16 threads, one Rs 1,000 cap. Read-compare-write breaches every trial; authorize-and-reserve never does.</a:t>
             </a:r>
           </a:p>
         </p:txBody>

--- a/docs/Razorpay_Buildathon_Action_Firewall_Deck.pptx
+++ b/docs/Razorpay_Buildathon_Action_Firewall_Deck.pptx
@@ -7133,7 +7133,7 @@
               </a:defRPr>
             </a:pPr>
             <a:r>
-              <a:t>800 / 800</a:t>
+              <a:t>850 / 850</a:t>
             </a:r>
           </a:p>
           <a:p>
@@ -7151,7 +7151,7 @@
             <a:br/>
             <a:br/>
             <a:r>
-              <a:t>Across 21 failure families. A spend-cap-only guard — what most "AI guardrails" are — lets 640 of the same 800 through.</a:t>
+              <a:t>Across 22 failure families. A spend-cap-only guard — what most "AI guardrails" are — lets 690 of the same 850 through.</a:t>
             </a:r>
           </a:p>
         </p:txBody>
